--- a/API Test Scenario Unimicron.pptx
+++ b/API Test Scenario Unimicron.pptx
@@ -133,12 +133,12 @@
   <pc:docChgLst>
     <pc:chgData name="Mekkalar Sansiri" userId="145dff72-4b65-4c5d-b4d7-3b1dfdedd8b8" providerId="ADAL" clId="{EB6CF386-E4E5-457B-A1A1-0A77AF0D5A51}"/>
     <pc:docChg chg="undo redo custSel addSld delSld modSld sldOrd">
-      <pc:chgData name="Mekkalar Sansiri" userId="145dff72-4b65-4c5d-b4d7-3b1dfdedd8b8" providerId="ADAL" clId="{EB6CF386-E4E5-457B-A1A1-0A77AF0D5A51}" dt="2026-04-28T01:17:17.251" v="858"/>
+      <pc:chgData name="Mekkalar Sansiri" userId="145dff72-4b65-4c5d-b4d7-3b1dfdedd8b8" providerId="ADAL" clId="{EB6CF386-E4E5-457B-A1A1-0A77AF0D5A51}" dt="2026-05-09T01:45:01.182" v="974" actId="20577"/>
       <pc:docMkLst>
         <pc:docMk/>
       </pc:docMkLst>
       <pc:sldChg chg="addSp delSp modSp mod ord">
-        <pc:chgData name="Mekkalar Sansiri" userId="145dff72-4b65-4c5d-b4d7-3b1dfdedd8b8" providerId="ADAL" clId="{EB6CF386-E4E5-457B-A1A1-0A77AF0D5A51}" dt="2026-04-28T01:17:17.251" v="858"/>
+        <pc:chgData name="Mekkalar Sansiri" userId="145dff72-4b65-4c5d-b4d7-3b1dfdedd8b8" providerId="ADAL" clId="{EB6CF386-E4E5-457B-A1A1-0A77AF0D5A51}" dt="2026-05-09T01:44:45.556" v="963" actId="20578"/>
         <pc:sldMkLst>
           <pc:docMk/>
           <pc:sldMk cId="0" sldId="256"/>
@@ -168,7 +168,7 @@
           </ac:spMkLst>
         </pc:spChg>
         <pc:spChg chg="mod">
-          <ac:chgData name="Mekkalar Sansiri" userId="145dff72-4b65-4c5d-b4d7-3b1dfdedd8b8" providerId="ADAL" clId="{EB6CF386-E4E5-457B-A1A1-0A77AF0D5A51}" dt="2026-04-28T01:16:31.409" v="857"/>
+          <ac:chgData name="Mekkalar Sansiri" userId="145dff72-4b65-4c5d-b4d7-3b1dfdedd8b8" providerId="ADAL" clId="{EB6CF386-E4E5-457B-A1A1-0A77AF0D5A51}" dt="2026-05-09T01:44:45.556" v="963" actId="20578"/>
           <ac:spMkLst>
             <pc:docMk/>
             <pc:sldMk cId="0" sldId="256"/>
@@ -293,14 +293,6 @@
             <pc:docMk/>
             <pc:sldMk cId="0" sldId="256"/>
             <ac:spMk id="29" creationId="{00000000-0000-0000-0000-000000000000}"/>
-          </ac:spMkLst>
-        </pc:spChg>
-        <pc:spChg chg="add del">
-          <ac:chgData name="Mekkalar Sansiri" userId="145dff72-4b65-4c5d-b4d7-3b1dfdedd8b8" providerId="ADAL" clId="{EB6CF386-E4E5-457B-A1A1-0A77AF0D5A51}" dt="2026-04-27T06:28:23.147" v="284" actId="22"/>
-          <ac:spMkLst>
-            <pc:docMk/>
-            <pc:sldMk cId="0" sldId="256"/>
-            <ac:spMk id="31" creationId="{05E390C8-A697-3AE4-7096-425978C20B6C}"/>
           </ac:spMkLst>
         </pc:spChg>
       </pc:sldChg>
@@ -1827,86 +1819,6 @@
             <ac:spMk id="85" creationId="{00000000-0000-0000-0000-000000000000}"/>
           </ac:spMkLst>
         </pc:spChg>
-        <pc:spChg chg="del mod">
-          <ac:chgData name="Mekkalar Sansiri" userId="145dff72-4b65-4c5d-b4d7-3b1dfdedd8b8" providerId="ADAL" clId="{EB6CF386-E4E5-457B-A1A1-0A77AF0D5A51}" dt="2026-04-27T07:35:02.394" v="523" actId="478"/>
-          <ac:spMkLst>
-            <pc:docMk/>
-            <pc:sldMk cId="0" sldId="268"/>
-            <ac:spMk id="86" creationId="{00000000-0000-0000-0000-000000000000}"/>
-          </ac:spMkLst>
-        </pc:spChg>
-        <pc:spChg chg="del">
-          <ac:chgData name="Mekkalar Sansiri" userId="145dff72-4b65-4c5d-b4d7-3b1dfdedd8b8" providerId="ADAL" clId="{EB6CF386-E4E5-457B-A1A1-0A77AF0D5A51}" dt="2026-04-27T07:35:13.430" v="532" actId="478"/>
-          <ac:spMkLst>
-            <pc:docMk/>
-            <pc:sldMk cId="0" sldId="268"/>
-            <ac:spMk id="87" creationId="{00000000-0000-0000-0000-000000000000}"/>
-          </ac:spMkLst>
-        </pc:spChg>
-        <pc:spChg chg="del">
-          <ac:chgData name="Mekkalar Sansiri" userId="145dff72-4b65-4c5d-b4d7-3b1dfdedd8b8" providerId="ADAL" clId="{EB6CF386-E4E5-457B-A1A1-0A77AF0D5A51}" dt="2026-04-27T07:35:14.456" v="533" actId="478"/>
-          <ac:spMkLst>
-            <pc:docMk/>
-            <pc:sldMk cId="0" sldId="268"/>
-            <ac:spMk id="88" creationId="{00000000-0000-0000-0000-000000000000}"/>
-          </ac:spMkLst>
-        </pc:spChg>
-        <pc:spChg chg="del">
-          <ac:chgData name="Mekkalar Sansiri" userId="145dff72-4b65-4c5d-b4d7-3b1dfdedd8b8" providerId="ADAL" clId="{EB6CF386-E4E5-457B-A1A1-0A77AF0D5A51}" dt="2026-04-27T07:35:09.073" v="528" actId="478"/>
-          <ac:spMkLst>
-            <pc:docMk/>
-            <pc:sldMk cId="0" sldId="268"/>
-            <ac:spMk id="89" creationId="{00000000-0000-0000-0000-000000000000}"/>
-          </ac:spMkLst>
-        </pc:spChg>
-        <pc:spChg chg="del">
-          <ac:chgData name="Mekkalar Sansiri" userId="145dff72-4b65-4c5d-b4d7-3b1dfdedd8b8" providerId="ADAL" clId="{EB6CF386-E4E5-457B-A1A1-0A77AF0D5A51}" dt="2026-04-27T07:35:10.373" v="529" actId="478"/>
-          <ac:spMkLst>
-            <pc:docMk/>
-            <pc:sldMk cId="0" sldId="268"/>
-            <ac:spMk id="90" creationId="{00000000-0000-0000-0000-000000000000}"/>
-          </ac:spMkLst>
-        </pc:spChg>
-        <pc:spChg chg="del">
-          <ac:chgData name="Mekkalar Sansiri" userId="145dff72-4b65-4c5d-b4d7-3b1dfdedd8b8" providerId="ADAL" clId="{EB6CF386-E4E5-457B-A1A1-0A77AF0D5A51}" dt="2026-04-27T07:35:12.506" v="531" actId="478"/>
-          <ac:spMkLst>
-            <pc:docMk/>
-            <pc:sldMk cId="0" sldId="268"/>
-            <ac:spMk id="91" creationId="{00000000-0000-0000-0000-000000000000}"/>
-          </ac:spMkLst>
-        </pc:spChg>
-        <pc:spChg chg="del mod">
-          <ac:chgData name="Mekkalar Sansiri" userId="145dff72-4b65-4c5d-b4d7-3b1dfdedd8b8" providerId="ADAL" clId="{EB6CF386-E4E5-457B-A1A1-0A77AF0D5A51}" dt="2026-04-27T07:35:11.416" v="530" actId="478"/>
-          <ac:spMkLst>
-            <pc:docMk/>
-            <pc:sldMk cId="0" sldId="268"/>
-            <ac:spMk id="92" creationId="{00000000-0000-0000-0000-000000000000}"/>
-          </ac:spMkLst>
-        </pc:spChg>
-        <pc:spChg chg="del">
-          <ac:chgData name="Mekkalar Sansiri" userId="145dff72-4b65-4c5d-b4d7-3b1dfdedd8b8" providerId="ADAL" clId="{EB6CF386-E4E5-457B-A1A1-0A77AF0D5A51}" dt="2026-04-27T07:35:08.169" v="527" actId="478"/>
-          <ac:spMkLst>
-            <pc:docMk/>
-            <pc:sldMk cId="0" sldId="268"/>
-            <ac:spMk id="93" creationId="{00000000-0000-0000-0000-000000000000}"/>
-          </ac:spMkLst>
-        </pc:spChg>
-        <pc:spChg chg="del">
-          <ac:chgData name="Mekkalar Sansiri" userId="145dff72-4b65-4c5d-b4d7-3b1dfdedd8b8" providerId="ADAL" clId="{EB6CF386-E4E5-457B-A1A1-0A77AF0D5A51}" dt="2026-04-27T07:35:06.993" v="526" actId="478"/>
-          <ac:spMkLst>
-            <pc:docMk/>
-            <pc:sldMk cId="0" sldId="268"/>
-            <ac:spMk id="94" creationId="{00000000-0000-0000-0000-000000000000}"/>
-          </ac:spMkLst>
-        </pc:spChg>
-        <pc:spChg chg="del mod">
-          <ac:chgData name="Mekkalar Sansiri" userId="145dff72-4b65-4c5d-b4d7-3b1dfdedd8b8" providerId="ADAL" clId="{EB6CF386-E4E5-457B-A1A1-0A77AF0D5A51}" dt="2026-04-27T07:35:05.998" v="525" actId="478"/>
-          <ac:spMkLst>
-            <pc:docMk/>
-            <pc:sldMk cId="0" sldId="268"/>
-            <ac:spMk id="95" creationId="{00000000-0000-0000-0000-000000000000}"/>
-          </ac:spMkLst>
-        </pc:spChg>
       </pc:sldChg>
       <pc:sldChg chg="modSp mod">
         <pc:chgData name="Mekkalar Sansiri" userId="145dff72-4b65-4c5d-b4d7-3b1dfdedd8b8" providerId="ADAL" clId="{EB6CF386-E4E5-457B-A1A1-0A77AF0D5A51}" dt="2026-04-28T01:17:17.251" v="858"/>
@@ -2185,95 +2097,15 @@
             <ac:spMk id="30" creationId="{00000000-0000-0000-0000-000000000000}"/>
           </ac:spMkLst>
         </pc:spChg>
-        <pc:spChg chg="del">
-          <ac:chgData name="Mekkalar Sansiri" userId="145dff72-4b65-4c5d-b4d7-3b1dfdedd8b8" providerId="ADAL" clId="{EB6CF386-E4E5-457B-A1A1-0A77AF0D5A51}" dt="2026-04-27T06:21:13.549" v="159" actId="478"/>
-          <ac:spMkLst>
-            <pc:docMk/>
-            <pc:sldMk cId="0" sldId="270"/>
-            <ac:spMk id="34" creationId="{00000000-0000-0000-0000-000000000000}"/>
-          </ac:spMkLst>
-        </pc:spChg>
-        <pc:spChg chg="del">
-          <ac:chgData name="Mekkalar Sansiri" userId="145dff72-4b65-4c5d-b4d7-3b1dfdedd8b8" providerId="ADAL" clId="{EB6CF386-E4E5-457B-A1A1-0A77AF0D5A51}" dt="2026-04-27T06:21:13.549" v="159" actId="478"/>
-          <ac:spMkLst>
-            <pc:docMk/>
-            <pc:sldMk cId="0" sldId="270"/>
-            <ac:spMk id="36" creationId="{00000000-0000-0000-0000-000000000000}"/>
-          </ac:spMkLst>
-        </pc:spChg>
-        <pc:spChg chg="del">
-          <ac:chgData name="Mekkalar Sansiri" userId="145dff72-4b65-4c5d-b4d7-3b1dfdedd8b8" providerId="ADAL" clId="{EB6CF386-E4E5-457B-A1A1-0A77AF0D5A51}" dt="2026-04-27T06:21:13.549" v="159" actId="478"/>
-          <ac:spMkLst>
-            <pc:docMk/>
-            <pc:sldMk cId="0" sldId="270"/>
-            <ac:spMk id="37" creationId="{00000000-0000-0000-0000-000000000000}"/>
-          </ac:spMkLst>
-        </pc:spChg>
-        <pc:spChg chg="del">
-          <ac:chgData name="Mekkalar Sansiri" userId="145dff72-4b65-4c5d-b4d7-3b1dfdedd8b8" providerId="ADAL" clId="{EB6CF386-E4E5-457B-A1A1-0A77AF0D5A51}" dt="2026-04-27T06:21:13.549" v="159" actId="478"/>
-          <ac:spMkLst>
-            <pc:docMk/>
-            <pc:sldMk cId="0" sldId="270"/>
-            <ac:spMk id="38" creationId="{00000000-0000-0000-0000-000000000000}"/>
-          </ac:spMkLst>
-        </pc:spChg>
-        <pc:spChg chg="del">
-          <ac:chgData name="Mekkalar Sansiri" userId="145dff72-4b65-4c5d-b4d7-3b1dfdedd8b8" providerId="ADAL" clId="{EB6CF386-E4E5-457B-A1A1-0A77AF0D5A51}" dt="2026-04-27T06:21:13.549" v="159" actId="478"/>
-          <ac:spMkLst>
-            <pc:docMk/>
-            <pc:sldMk cId="0" sldId="270"/>
-            <ac:spMk id="40" creationId="{00000000-0000-0000-0000-000000000000}"/>
-          </ac:spMkLst>
-        </pc:spChg>
-        <pc:spChg chg="del">
-          <ac:chgData name="Mekkalar Sansiri" userId="145dff72-4b65-4c5d-b4d7-3b1dfdedd8b8" providerId="ADAL" clId="{EB6CF386-E4E5-457B-A1A1-0A77AF0D5A51}" dt="2026-04-27T06:21:13.549" v="159" actId="478"/>
-          <ac:spMkLst>
-            <pc:docMk/>
-            <pc:sldMk cId="0" sldId="270"/>
-            <ac:spMk id="41" creationId="{00000000-0000-0000-0000-000000000000}"/>
-          </ac:spMkLst>
-        </pc:spChg>
-        <pc:spChg chg="del">
-          <ac:chgData name="Mekkalar Sansiri" userId="145dff72-4b65-4c5d-b4d7-3b1dfdedd8b8" providerId="ADAL" clId="{EB6CF386-E4E5-457B-A1A1-0A77AF0D5A51}" dt="2026-04-27T06:21:13.549" v="159" actId="478"/>
-          <ac:spMkLst>
-            <pc:docMk/>
-            <pc:sldMk cId="0" sldId="270"/>
-            <ac:spMk id="43" creationId="{00000000-0000-0000-0000-000000000000}"/>
-          </ac:spMkLst>
-        </pc:spChg>
-        <pc:spChg chg="del">
-          <ac:chgData name="Mekkalar Sansiri" userId="145dff72-4b65-4c5d-b4d7-3b1dfdedd8b8" providerId="ADAL" clId="{EB6CF386-E4E5-457B-A1A1-0A77AF0D5A51}" dt="2026-04-27T06:21:13.549" v="159" actId="478"/>
-          <ac:spMkLst>
-            <pc:docMk/>
-            <pc:sldMk cId="0" sldId="270"/>
-            <ac:spMk id="46" creationId="{00000000-0000-0000-0000-000000000000}"/>
-          </ac:spMkLst>
-        </pc:spChg>
-        <pc:spChg chg="del">
-          <ac:chgData name="Mekkalar Sansiri" userId="145dff72-4b65-4c5d-b4d7-3b1dfdedd8b8" providerId="ADAL" clId="{EB6CF386-E4E5-457B-A1A1-0A77AF0D5A51}" dt="2026-04-27T06:21:13.549" v="159" actId="478"/>
-          <ac:spMkLst>
-            <pc:docMk/>
-            <pc:sldMk cId="0" sldId="270"/>
-            <ac:spMk id="49" creationId="{00000000-0000-0000-0000-000000000000}"/>
-          </ac:spMkLst>
-        </pc:spChg>
-        <pc:spChg chg="del">
-          <ac:chgData name="Mekkalar Sansiri" userId="145dff72-4b65-4c5d-b4d7-3b1dfdedd8b8" providerId="ADAL" clId="{EB6CF386-E4E5-457B-A1A1-0A77AF0D5A51}" dt="2026-04-27T06:21:13.549" v="159" actId="478"/>
-          <ac:spMkLst>
-            <pc:docMk/>
-            <pc:sldMk cId="0" sldId="270"/>
-            <ac:spMk id="52" creationId="{00000000-0000-0000-0000-000000000000}"/>
-          </ac:spMkLst>
-        </pc:spChg>
       </pc:sldChg>
       <pc:sldChg chg="modSp add mod">
-        <pc:chgData name="Mekkalar Sansiri" userId="145dff72-4b65-4c5d-b4d7-3b1dfdedd8b8" providerId="ADAL" clId="{EB6CF386-E4E5-457B-A1A1-0A77AF0D5A51}" dt="2026-04-27T07:55:38.246" v="856" actId="20577"/>
+        <pc:chgData name="Mekkalar Sansiri" userId="145dff72-4b65-4c5d-b4d7-3b1dfdedd8b8" providerId="ADAL" clId="{EB6CF386-E4E5-457B-A1A1-0A77AF0D5A51}" dt="2026-05-09T01:45:01.182" v="974" actId="20577"/>
         <pc:sldMkLst>
           <pc:docMk/>
           <pc:sldMk cId="1279534721" sldId="271"/>
         </pc:sldMkLst>
         <pc:spChg chg="mod">
-          <ac:chgData name="Mekkalar Sansiri" userId="145dff72-4b65-4c5d-b4d7-3b1dfdedd8b8" providerId="ADAL" clId="{EB6CF386-E4E5-457B-A1A1-0A77AF0D5A51}" dt="2026-04-27T07:55:38.246" v="856" actId="20577"/>
+          <ac:chgData name="Mekkalar Sansiri" userId="145dff72-4b65-4c5d-b4d7-3b1dfdedd8b8" providerId="ADAL" clId="{EB6CF386-E4E5-457B-A1A1-0A77AF0D5A51}" dt="2026-05-09T01:45:01.182" v="974" actId="20577"/>
           <ac:spMkLst>
             <pc:docMk/>
             <pc:sldMk cId="1279534721" sldId="271"/>
@@ -2327,13 +2159,6 @@
             <ac:spMk id="10" creationId="{00000000-0000-0000-0000-000000000000}"/>
           </ac:spMkLst>
         </pc:spChg>
-      </pc:sldChg>
-      <pc:sldChg chg="add del">
-        <pc:chgData name="Mekkalar Sansiri" userId="145dff72-4b65-4c5d-b4d7-3b1dfdedd8b8" providerId="ADAL" clId="{EB6CF386-E4E5-457B-A1A1-0A77AF0D5A51}" dt="2026-04-27T06:14:48.765" v="56"/>
-        <pc:sldMkLst>
-          <pc:docMk/>
-          <pc:sldMk cId="256047367" sldId="272"/>
-        </pc:sldMkLst>
       </pc:sldChg>
     </pc:docChg>
   </pc:docChgLst>
@@ -3887,7 +3712,7 @@
             <a:fld id="{66481420-B83C-4C58-A0EC-1A3071E587E2}" type="datetime1">
               <a:rPr kumimoji="1" lang="ja-JP" altLang="en-US" smtClean="0"/>
               <a:pPr/>
-              <a:t>2026/4/28</a:t>
+              <a:t>2026/5/9</a:t>
             </a:fld>
             <a:endParaRPr kumimoji="1" lang="ja-JP" altLang="en-US"/>
           </a:p>
@@ -4472,8 +4297,8 @@
         </p:nvSpPr>
         <p:spPr>
           <a:xfrm>
-            <a:off x="1495201" y="3468260"/>
-            <a:ext cx="4331122" cy="1911036"/>
+            <a:off x="1447112" y="3468260"/>
+            <a:ext cx="4379211" cy="1648208"/>
           </a:xfrm>
           <a:prstGeom prst="rect">
             <a:avLst/>
@@ -4488,20 +4313,21 @@
           <a:p>
             <a:pPr algn="r"/>
             <a:r>
+              <a:rPr kumimoji="1" lang="en-GB" altLang="ja-JP" b="1" dirty="0"/>
+              <a:t>Flow meter </a:t>
+            </a:r>
+            <a:r>
+              <a:rPr kumimoji="1" lang="en-GB" altLang="ja-JP" b="1"/>
+              <a:t>Visualization System</a:t>
+            </a:r>
+            <a:endParaRPr kumimoji="1" lang="en-GB" altLang="ja-JP" sz="1662" b="1" dirty="0"/>
+          </a:p>
+          <a:p>
+            <a:pPr algn="r"/>
+            <a:r>
               <a:rPr kumimoji="1" lang="en-GB" altLang="ja-JP" sz="1662" b="1" dirty="0"/>
-              <a:t>Flow meter Visualization API </a:t>
-            </a:r>
-          </a:p>
-          <a:p>
-            <a:pPr algn="r"/>
-            <a:r>
-              <a:rPr kumimoji="1" lang="en-GB" altLang="ja-JP" sz="1662" b="1" dirty="0"/>
-              <a:t>Documentation EN Test Scenario for Unimicron</a:t>
-            </a:r>
-            <a:endParaRPr kumimoji="1" lang="en-US" altLang="ja-JP" sz="1846" b="1" dirty="0"/>
-          </a:p>
-          <a:p>
-            <a:pPr algn="r"/>
+              <a:t>Documentation EN Test Scenario for Unimicron </a:t>
+            </a:r>
             <a:endParaRPr kumimoji="1" lang="en-US" altLang="ja-JP" sz="1846" dirty="0"/>
           </a:p>
           <a:p>
@@ -4515,16 +4341,12 @@
               <a:t>Made for: </a:t>
             </a:r>
             <a:r>
-              <a:rPr kumimoji="1" lang="it-IT" altLang="ja-JP" sz="1662"/>
+              <a:rPr kumimoji="1" lang="it-IT" altLang="ja-JP" sz="1662" dirty="0"/>
               <a:t>Unimicron </a:t>
             </a:r>
             <a:r>
-              <a:rPr kumimoji="1" lang="en-US" altLang="ja-JP" sz="1662"/>
-              <a:t>(</a:t>
-            </a:r>
-            <a:r>
               <a:rPr kumimoji="1" lang="en-US" altLang="ja-JP" sz="1662" dirty="0"/>
-              <a:t>Thailand)</a:t>
+              <a:t>(Thailand)</a:t>
             </a:r>
             <a:r>
               <a:rPr kumimoji="1" lang="it-IT" altLang="ja-JP" sz="1662" dirty="0"/>
